--- a/Slides/Semana 10/semana_10_slides.pptx
+++ b/Slides/Semana 10/semana_10_slides.pptx
@@ -796,7 +796,7 @@
 - "Essa mensagem faria sentido para alguém que não conhece o projeto?"
 - "Qual é a chamada à ação desta peça?"
 Avaliação nesta semana: continuidade do ciclo de observação da Etapa de Preparação (Semanas 8–11), segundo a Rubrica de Avaliação. Observa-se Planejamento (coerência da estratégia com público-alvo e cronograma), Gestão do Projeto (integração da comunicação à lista de materiais) e Interação com a Comunidade (adequação de linguagem e canais ao público).
-Fonte: Plano Semanal Semana 10, Cronograma, CLAUDE.md, COURSE_CONTEXT.md, PEDAGOGICAL_RULES.md, EXTENSION_PROJECT_GUIDE.md.</a:t>
+Fonte: Plano Semanal Semana 10, Cronograma.</a:t>
             </a:r>
             <a:endParaRPr lang="en-US" dirty="0"/>
           </a:p>
